--- a/SDC/教学资料/课件/E6-规格驱动的需求变更.pptx
+++ b/SDC/教学资料/课件/E6-规格驱动的需求变更.pptx
@@ -21,11 +21,11 @@
     <p:sldId id="262" r:id="rId36"/>
     <p:sldId id="263" r:id="rId30"/>
     <p:sldId id="264" r:id="rId31"/>
-    <p:sldId id="265" r:id="rId32"/>
-    <p:sldId id="267" r:id="rId14"/>
     <p:sldId id="270" r:id="rId33"/>
     <p:sldId id="268" r:id="rId15"/>
     <p:sldId id="269" r:id="rId16"/>
+    <p:sldId id="267" r:id="rId14"/>
+    <p:sldId id="265" r:id="rId32"/>
     <p:sldId id="271" r:id="rId34"/>
     <p:sldId id="266" r:id="rId37"/>
     <p:sldId id="272" r:id="rId17"/>
@@ -4296,7 +4296,7 @@
           </a:p>
           <a:p>
             <a:r>
-              <a:t>代价：把库存预警当成每个人的题目，就盖过了本人在 E5 已经选过的需求。</a:t>
+              <a:t>代价：把库存预警当成每个人的题目，就盖过了本人在 E5 已经选过的需求。选题规则见第 25 页：原则上沿用 E5 所选需求，另选要写理由。</a:t>
             </a:r>
           </a:p>
           <a:p>
